--- a/exports/Schwans_Pitch_Deck.pptx
+++ b/exports/Schwans_Pitch_Deck.pptx
@@ -2591,6 +2591,45 @@
         </p:nvSpPr>
         <p:spPr>
           <a:xfrm>
+            <a:off x="685800" y="5989320"/>
+            <a:ext cx="10515600" cy="365760"/>
+          </a:xfrm>
+          <a:prstGeom prst="rect">
+            <a:avLst/>
+          </a:prstGeom>
+          <a:noFill/>
+          <a:ln/>
+        </p:spPr>
+        <p:txBody>
+          <a:bodyPr wrap="square" lIns="0" tIns="0" rIns="0" bIns="0" rtlCol="0" anchor="ctr"/>
+          <a:lstStyle/>
+          <a:p>
+            <a:pPr indent="0" marL="0">
+              <a:buNone/>
+            </a:pPr>
+            <a:r>
+              <a:rPr lang="en-US" sz="1100" dirty="0">
+                <a:solidFill>
+                  <a:srgbClr val="6B7280"/>
+                </a:solidFill>
+                <a:latin typeface="Calibri" pitchFamily="34" charset="0"/>
+                <a:ea typeface="Calibri" pitchFamily="34" charset="-122"/>
+                <a:cs typeface="Calibri" pitchFamily="34" charset="-120"/>
+              </a:rPr>
+              <a:t>Headcount from Schwan's published figures. Deloitte and The Manufacturing Institute put the wider skills gap at 2.1 million unfilled jobs by 2030.</a:t>
+            </a:r>
+            <a:endParaRPr lang="en-US" sz="1100" dirty="0"/>
+          </a:p>
+        </p:txBody>
+      </p:sp>
+      <p:sp>
+        <p:nvSpPr>
+          <p:cNvPr id="7" name="Text 5"/>
+          <p:cNvSpPr txBox="1"/>
+          <p:nvPr/>
+        </p:nvSpPr>
+        <p:spPr>
+          <a:xfrm>
             <a:off x="685800" y="4160520"/>
             <a:ext cx="2468880" cy="822960"/>
           </a:xfrm>
@@ -2616,7 +2655,7 @@
                 <a:ea typeface="Cambria" pitchFamily="34" charset="-122"/>
                 <a:cs typeface="Cambria" pitchFamily="34" charset="-120"/>
               </a:rPr>
-              <a:t>16</a:t>
+              <a:t>8,500</a:t>
             </a:r>
             <a:endParaRPr lang="en-US" sz="5200" dirty="0"/>
           </a:p>
@@ -2624,7 +2663,7 @@
       </p:sp>
       <p:sp>
         <p:nvSpPr>
-          <p:cNvPr id="7" name="Text 5"/>
+          <p:cNvPr id="8" name="Text 6"/>
           <p:cNvSpPr txBox="1"/>
           <p:nvPr/>
         </p:nvSpPr>
@@ -2655,7 +2694,7 @@
                 <a:ea typeface="Calibri" pitchFamily="34" charset="-122"/>
                 <a:cs typeface="Calibri" pitchFamily="34" charset="-120"/>
               </a:rPr>
-              <a:t>plants</a:t>
+              <a:t>employees</a:t>
             </a:r>
             <a:endParaRPr lang="en-US" sz="1400" dirty="0"/>
           </a:p>
@@ -2663,7 +2702,7 @@
       </p:sp>
       <p:sp>
         <p:nvSpPr>
-          <p:cNvPr id="8" name="Text 6"/>
+          <p:cNvPr id="9" name="Text 7"/>
           <p:cNvSpPr txBox="1"/>
           <p:nvPr/>
         </p:nvSpPr>
@@ -2694,7 +2733,7 @@
                 <a:ea typeface="Cambria" pitchFamily="34" charset="-122"/>
                 <a:cs typeface="Cambria" pitchFamily="34" charset="-120"/>
               </a:rPr>
-              <a:t>3</a:t>
+              <a:t>16</a:t>
             </a:r>
             <a:endParaRPr lang="en-US" sz="5200" dirty="0"/>
           </a:p>
@@ -2702,7 +2741,7 @@
       </p:sp>
       <p:sp>
         <p:nvSpPr>
-          <p:cNvPr id="9" name="Text 7"/>
+          <p:cNvPr id="10" name="Text 8"/>
           <p:cNvSpPr txBox="1"/>
           <p:nvPr/>
         </p:nvSpPr>
@@ -2733,7 +2772,7 @@
                 <a:ea typeface="Calibri" pitchFamily="34" charset="-122"/>
                 <a:cs typeface="Calibri" pitchFamily="34" charset="-120"/>
               </a:rPr>
-              <a:t>corporate offices</a:t>
+              <a:t>plants, plus 3 offices</a:t>
             </a:r>
             <a:endParaRPr lang="en-US" sz="1400" dirty="0"/>
           </a:p>
@@ -2741,7 +2780,7 @@
       </p:sp>
       <p:sp>
         <p:nvSpPr>
-          <p:cNvPr id="10" name="Text 8"/>
+          <p:cNvPr id="11" name="Text 9"/>
           <p:cNvSpPr txBox="1"/>
           <p:nvPr/>
         </p:nvSpPr>
@@ -2780,7 +2819,7 @@
       </p:sp>
       <p:sp>
         <p:nvSpPr>
-          <p:cNvPr id="11" name="Text 9"/>
+          <p:cNvPr id="12" name="Text 10"/>
           <p:cNvSpPr txBox="1"/>
           <p:nvPr/>
         </p:nvSpPr>
@@ -2819,7 +2858,7 @@
       </p:sp>
       <p:sp>
         <p:nvSpPr>
-          <p:cNvPr id="12" name="Text 10"/>
+          <p:cNvPr id="13" name="Text 11"/>
           <p:cNvSpPr txBox="1"/>
           <p:nvPr/>
         </p:nvSpPr>
@@ -2858,7 +2897,7 @@
       </p:sp>
       <p:sp>
         <p:nvSpPr>
-          <p:cNvPr id="13" name="Text 11"/>
+          <p:cNvPr id="14" name="Text 12"/>
           <p:cNvSpPr txBox="1"/>
           <p:nvPr/>
         </p:nvSpPr>
@@ -2999,7 +3038,7 @@
                 <a:ea typeface="Calibri" pitchFamily="34" charset="-122"/>
                 <a:cs typeface="Calibri" pitchFamily="34" charset="-120"/>
               </a:rPr>
-              <a:t>Five questions from the challenge. One page each.</a:t>
+              <a:t>The five questions from the challenge, one page each, plus the employee's own view.</a:t>
             </a:r>
             <a:endParaRPr lang="en-US" sz="1500" dirty="0"/>
           </a:p>
@@ -3136,7 +3175,7 @@
                 <a:ea typeface="Calibri" pitchFamily="34" charset="-122"/>
                 <a:cs typeface="Calibri" pitchFamily="34" charset="-120"/>
               </a:rPr>
-              <a:t>A ranked list of what to fix first, plus the biggest gaps today.</a:t>
+              <a:t>A ranked list of what to fix first, plus where coverage is lowest.</a:t>
             </a:r>
             <a:endParaRPr lang="en-US" sz="1450" dirty="0"/>
           </a:p>
@@ -3150,7 +3189,7 @@
         </p:nvSpPr>
         <p:spPr>
           <a:xfrm>
-            <a:off x="685800" y="2734056"/>
+            <a:off x="685800" y="2606040"/>
             <a:ext cx="384048" cy="384048"/>
           </a:xfrm>
           <a:prstGeom prst="ellipse">
@@ -3170,7 +3209,7 @@
         </p:nvSpPr>
         <p:spPr>
           <a:xfrm>
-            <a:off x="685800" y="2734056"/>
+            <a:off x="685800" y="2606040"/>
             <a:ext cx="384048" cy="384048"/>
           </a:xfrm>
           <a:prstGeom prst="rect">
@@ -3209,7 +3248,7 @@
         </p:nvSpPr>
         <p:spPr>
           <a:xfrm>
-            <a:off x="1325880" y="2679192"/>
+            <a:off x="1325880" y="2551176"/>
             <a:ext cx="2834640" cy="365760"/>
           </a:xfrm>
           <a:prstGeom prst="rect">
@@ -3248,7 +3287,7 @@
         </p:nvSpPr>
         <p:spPr>
           <a:xfrm>
-            <a:off x="4251960" y="2697480"/>
+            <a:off x="4251960" y="2569464"/>
             <a:ext cx="6949440" cy="548640"/>
           </a:xfrm>
           <a:prstGeom prst="rect">
@@ -3287,7 +3326,7 @@
         </p:nvSpPr>
         <p:spPr>
           <a:xfrm>
-            <a:off x="685800" y="3630168"/>
+            <a:off x="685800" y="3374136"/>
             <a:ext cx="384048" cy="384048"/>
           </a:xfrm>
           <a:prstGeom prst="ellipse">
@@ -3307,7 +3346,7 @@
         </p:nvSpPr>
         <p:spPr>
           <a:xfrm>
-            <a:off x="685800" y="3630168"/>
+            <a:off x="685800" y="3374136"/>
             <a:ext cx="384048" cy="384048"/>
           </a:xfrm>
           <a:prstGeom prst="rect">
@@ -3346,7 +3385,7 @@
         </p:nvSpPr>
         <p:spPr>
           <a:xfrm>
-            <a:off x="1325880" y="3575304"/>
+            <a:off x="1325880" y="3319272"/>
             <a:ext cx="2834640" cy="365760"/>
           </a:xfrm>
           <a:prstGeom prst="rect">
@@ -3385,7 +3424,7 @@
         </p:nvSpPr>
         <p:spPr>
           <a:xfrm>
-            <a:off x="4251960" y="3593592"/>
+            <a:off x="4251960" y="3337560"/>
             <a:ext cx="6949440" cy="548640"/>
           </a:xfrm>
           <a:prstGeom prst="rect">
@@ -3424,7 +3463,7 @@
         </p:nvSpPr>
         <p:spPr>
           <a:xfrm>
-            <a:off x="685800" y="4526280"/>
+            <a:off x="685800" y="4142232"/>
             <a:ext cx="384048" cy="384048"/>
           </a:xfrm>
           <a:prstGeom prst="ellipse">
@@ -3444,7 +3483,7 @@
         </p:nvSpPr>
         <p:spPr>
           <a:xfrm>
-            <a:off x="685800" y="4526280"/>
+            <a:off x="685800" y="4142232"/>
             <a:ext cx="384048" cy="384048"/>
           </a:xfrm>
           <a:prstGeom prst="rect">
@@ -3483,7 +3522,7 @@
         </p:nvSpPr>
         <p:spPr>
           <a:xfrm>
-            <a:off x="1325880" y="4471416"/>
+            <a:off x="1325880" y="4087368"/>
             <a:ext cx="2834640" cy="365760"/>
           </a:xfrm>
           <a:prstGeom prst="rect">
@@ -3522,7 +3561,7 @@
         </p:nvSpPr>
         <p:spPr>
           <a:xfrm>
-            <a:off x="4251960" y="4489704"/>
+            <a:off x="4251960" y="4105656"/>
             <a:ext cx="6949440" cy="548640"/>
           </a:xfrm>
           <a:prstGeom prst="rect">
@@ -3561,7 +3600,7 @@
         </p:nvSpPr>
         <p:spPr>
           <a:xfrm>
-            <a:off x="685800" y="5422392"/>
+            <a:off x="685800" y="4910328"/>
             <a:ext cx="384048" cy="384048"/>
           </a:xfrm>
           <a:prstGeom prst="ellipse">
@@ -3581,7 +3620,7 @@
         </p:nvSpPr>
         <p:spPr>
           <a:xfrm>
-            <a:off x="685800" y="5422392"/>
+            <a:off x="685800" y="4910328"/>
             <a:ext cx="384048" cy="384048"/>
           </a:xfrm>
           <a:prstGeom prst="rect">
@@ -3620,7 +3659,7 @@
         </p:nvSpPr>
         <p:spPr>
           <a:xfrm>
-            <a:off x="1325880" y="5367528"/>
+            <a:off x="1325880" y="4855464"/>
             <a:ext cx="2834640" cy="365760"/>
           </a:xfrm>
           <a:prstGeom prst="rect">
@@ -3645,6 +3684,143 @@
                 <a:ea typeface="Calibri" pitchFamily="34" charset="-122"/>
                 <a:cs typeface="Calibri" pitchFamily="34" charset="-120"/>
               </a:rPr>
+              <a:t>Employee view</a:t>
+            </a:r>
+            <a:endParaRPr lang="en-US" sz="1700" dirty="0"/>
+          </a:p>
+        </p:txBody>
+      </p:sp>
+      <p:sp>
+        <p:nvSpPr>
+          <p:cNvPr id="23" name="Text 21"/>
+          <p:cNvSpPr txBox="1"/>
+          <p:nvPr/>
+        </p:nvSpPr>
+        <p:spPr>
+          <a:xfrm>
+            <a:off x="4251960" y="4873752"/>
+            <a:ext cx="6949440" cy="548640"/>
+          </a:xfrm>
+          <a:prstGeom prst="rect">
+            <a:avLst/>
+          </a:prstGeom>
+          <a:noFill/>
+          <a:ln/>
+        </p:spPr>
+        <p:txBody>
+          <a:bodyPr wrap="square" lIns="0" tIns="0" rIns="0" bIns="0" rtlCol="0" anchor="ctr"/>
+          <a:lstStyle/>
+          <a:p>
+            <a:pPr indent="0" marL="0">
+              <a:buNone/>
+            </a:pPr>
+            <a:r>
+              <a:rPr lang="en-US" sz="1450" dirty="0">
+                <a:solidFill>
+                  <a:srgbClr val="6B7280"/>
+                </a:solidFill>
+                <a:latin typeface="Calibri" pitchFamily="34" charset="0"/>
+                <a:ea typeface="Calibri" pitchFamily="34" charset="-122"/>
+                <a:cs typeface="Calibri" pitchFamily="34" charset="-120"/>
+              </a:rPr>
+              <a:t>The same data seen by the person: what you know, what only you know, and your next step.</a:t>
+            </a:r>
+            <a:endParaRPr lang="en-US" sz="1450" dirty="0"/>
+          </a:p>
+        </p:txBody>
+      </p:sp>
+      <p:sp>
+        <p:nvSpPr>
+          <p:cNvPr id="24" name="Shape 22"/>
+          <p:cNvSpPr/>
+          <p:nvPr/>
+        </p:nvSpPr>
+        <p:spPr>
+          <a:xfrm>
+            <a:off x="685800" y="5678424"/>
+            <a:ext cx="384048" cy="384048"/>
+          </a:xfrm>
+          <a:prstGeom prst="ellipse">
+            <a:avLst/>
+          </a:prstGeom>
+          <a:solidFill>
+            <a:srgbClr val="8E2B30"/>
+          </a:solidFill>
+          <a:ln/>
+        </p:spPr>
+      </p:sp>
+      <p:sp>
+        <p:nvSpPr>
+          <p:cNvPr id="25" name="Text 23"/>
+          <p:cNvSpPr txBox="1"/>
+          <p:nvPr/>
+        </p:nvSpPr>
+        <p:spPr>
+          <a:xfrm>
+            <a:off x="685800" y="5678424"/>
+            <a:ext cx="384048" cy="384048"/>
+          </a:xfrm>
+          <a:prstGeom prst="rect">
+            <a:avLst/>
+          </a:prstGeom>
+          <a:noFill/>
+          <a:ln/>
+        </p:spPr>
+        <p:txBody>
+          <a:bodyPr wrap="square" lIns="0" tIns="0" rIns="0" bIns="0" rtlCol="0" anchor="ctr"/>
+          <a:lstStyle/>
+          <a:p>
+            <a:pPr algn="ctr" indent="0" marL="0">
+              <a:buNone/>
+            </a:pPr>
+            <a:r>
+              <a:rPr lang="en-US" sz="1500" b="1" dirty="0">
+                <a:solidFill>
+                  <a:srgbClr val="FFFFFF"/>
+                </a:solidFill>
+                <a:latin typeface="Calibri" pitchFamily="34" charset="0"/>
+                <a:ea typeface="Calibri" pitchFamily="34" charset="-122"/>
+                <a:cs typeface="Calibri" pitchFamily="34" charset="-120"/>
+              </a:rPr>
+              <a:t>6</a:t>
+            </a:r>
+            <a:endParaRPr lang="en-US" sz="1500" dirty="0"/>
+          </a:p>
+        </p:txBody>
+      </p:sp>
+      <p:sp>
+        <p:nvSpPr>
+          <p:cNvPr id="26" name="Text 24"/>
+          <p:cNvSpPr txBox="1"/>
+          <p:nvPr/>
+        </p:nvSpPr>
+        <p:spPr>
+          <a:xfrm>
+            <a:off x="1325880" y="5623560"/>
+            <a:ext cx="2834640" cy="365760"/>
+          </a:xfrm>
+          <a:prstGeom prst="rect">
+            <a:avLst/>
+          </a:prstGeom>
+          <a:noFill/>
+          <a:ln/>
+        </p:spPr>
+        <p:txBody>
+          <a:bodyPr wrap="square" lIns="0" tIns="0" rIns="0" bIns="0" rtlCol="0" anchor="ctr"/>
+          <a:lstStyle/>
+          <a:p>
+            <a:pPr indent="0" marL="0">
+              <a:buNone/>
+            </a:pPr>
+            <a:r>
+              <a:rPr lang="en-US" sz="1700" b="1" dirty="0">
+                <a:solidFill>
+                  <a:srgbClr val="15181D"/>
+                </a:solidFill>
+                <a:latin typeface="Calibri" pitchFamily="34" charset="0"/>
+                <a:ea typeface="Calibri" pitchFamily="34" charset="-122"/>
+                <a:cs typeface="Calibri" pitchFamily="34" charset="-120"/>
+              </a:rPr>
               <a:t>Plants and offices</a:t>
             </a:r>
             <a:endParaRPr lang="en-US" sz="1700" dirty="0"/>
@@ -3653,13 +3829,13 @@
       </p:sp>
       <p:sp>
         <p:nvSpPr>
-          <p:cNvPr id="23" name="Text 21"/>
-          <p:cNvSpPr txBox="1"/>
-          <p:nvPr/>
-        </p:nvSpPr>
-        <p:spPr>
-          <a:xfrm>
-            <a:off x="4251960" y="5385816"/>
+          <p:cNvPr id="27" name="Text 25"/>
+          <p:cNvSpPr txBox="1"/>
+          <p:nvPr/>
+        </p:nvSpPr>
+        <p:spPr>
+          <a:xfrm>
+            <a:off x="4251960" y="5641848"/>
             <a:ext cx="6949440" cy="548640"/>
           </a:xfrm>
           <a:prstGeom prst="rect">
@@ -6468,7 +6644,7 @@
                 <a:ea typeface="Calibri" pitchFamily="34" charset="-122"/>
                 <a:cs typeface="Calibri" pitchFamily="34" charset="-120"/>
               </a:rPr>
-              <a:t>Real HR data instead of demo numbers.</a:t>
+              <a:t>Connect to the HR system so the numbers are live instead of seeded.</a:t>
             </a:r>
             <a:endParaRPr lang="en-US" sz="1700" dirty="0"/>
           </a:p>
@@ -6508,7 +6684,7 @@
                 <a:ea typeface="Calibri" pitchFamily="34" charset="-122"/>
                 <a:cs typeface="Calibri" pitchFamily="34" charset="-120"/>
               </a:rPr>
-              <a:t>An employee view, so a person sees their own plan.</a:t>
+              <a:t>Match people to plans automatically, instead of one written step per skill.</a:t>
             </a:r>
             <a:endParaRPr lang="en-US" sz="1700" dirty="0"/>
           </a:p>

--- a/exports/Schwans_Pitch_Deck.pptx
+++ b/exports/Schwans_Pitch_Deck.pptx
@@ -1228,7 +1228,7 @@
           <a:p>
             <a:r>
               <a:rPr lang="en-US" dirty="0"/>
-              <a:t>Schwan's has 16 plants, 3 offices and 4 job groups. What it does not have is one place that shows what its people can do.</a:t>
+              <a:t>More than a dozen US plants, four job groups, and a new plant opening in 2027. What the company does not have is one place that shows what its people can do.</a:t>
             </a:r>
             <a:endParaRPr lang="en-US" dirty="0"/>
           </a:p>
@@ -1668,7 +1668,7 @@
           <a:p>
             <a:r>
               <a:rPr lang="en-US" dirty="0"/>
-              <a:t>Sioux Falls needs automation techs before it opens. We are at 34 percent and need 65.</a:t>
+              <a:t>Sioux Falls, 700,000 square feet of Asian-style food production, needs automation techs before it opens in 2027. We are at 34 percent and need 65.</a:t>
             </a:r>
             <a:endParaRPr lang="en-US" dirty="0"/>
           </a:p>
@@ -2616,7 +2616,7 @@
                 <a:ea typeface="Calibri" pitchFamily="34" charset="-122"/>
                 <a:cs typeface="Calibri" pitchFamily="34" charset="-120"/>
               </a:rPr>
-              <a:t>Headcount from Schwan's published figures. Deloitte and The Manufacturing Institute put the wider skills gap at 2.1 million unfilled jobs by 2030.</a:t>
+              <a:t>Facility count and job groups from Schwan's own careers site. Deloitte and The Manufacturing Institute put the wider skills gap at 2.1 million unfilled jobs by 2030. Every source is listed in the app and in FACTS.md.</a:t>
             </a:r>
             <a:endParaRPr lang="en-US" sz="1100" dirty="0"/>
           </a:p>
@@ -2655,7 +2655,7 @@
                 <a:ea typeface="Cambria" pitchFamily="34" charset="-122"/>
                 <a:cs typeface="Cambria" pitchFamily="34" charset="-120"/>
               </a:rPr>
-              <a:t>8,500</a:t>
+              <a:t>12+</a:t>
             </a:r>
             <a:endParaRPr lang="en-US" sz="5200" dirty="0"/>
           </a:p>
@@ -2694,7 +2694,7 @@
                 <a:ea typeface="Calibri" pitchFamily="34" charset="-122"/>
                 <a:cs typeface="Calibri" pitchFamily="34" charset="-120"/>
               </a:rPr>
-              <a:t>employees</a:t>
+              <a:t>US facilities</a:t>
             </a:r>
             <a:endParaRPr lang="en-US" sz="1400" dirty="0"/>
           </a:p>
@@ -2733,7 +2733,7 @@
                 <a:ea typeface="Cambria" pitchFamily="34" charset="-122"/>
                 <a:cs typeface="Cambria" pitchFamily="34" charset="-120"/>
               </a:rPr>
-              <a:t>16</a:t>
+              <a:t>4</a:t>
             </a:r>
             <a:endParaRPr lang="en-US" sz="5200" dirty="0"/>
           </a:p>
@@ -2772,7 +2772,7 @@
                 <a:ea typeface="Calibri" pitchFamily="34" charset="-122"/>
                 <a:cs typeface="Calibri" pitchFamily="34" charset="-120"/>
               </a:rPr>
-              <a:t>plants, plus 3 offices</a:t>
+              <a:t>job groups</a:t>
             </a:r>
             <a:endParaRPr lang="en-US" sz="1400" dirty="0"/>
           </a:p>
@@ -2811,7 +2811,7 @@
                 <a:ea typeface="Cambria" pitchFamily="34" charset="-122"/>
                 <a:cs typeface="Cambria" pitchFamily="34" charset="-120"/>
               </a:rPr>
-              <a:t>4</a:t>
+              <a:t>2027</a:t>
             </a:r>
             <a:endParaRPr lang="en-US" sz="5200" dirty="0"/>
           </a:p>
@@ -2850,7 +2850,7 @@
                 <a:ea typeface="Calibri" pitchFamily="34" charset="-122"/>
                 <a:cs typeface="Calibri" pitchFamily="34" charset="-120"/>
               </a:rPr>
-              <a:t>job groups</a:t>
+              <a:t>Sioux Falls opens</a:t>
             </a:r>
             <a:endParaRPr lang="en-US" sz="1400" dirty="0"/>
           </a:p>
@@ -6044,7 +6044,7 @@
                 <a:ea typeface="Calibri" pitchFamily="34" charset="-122"/>
                 <a:cs typeface="Calibri" pitchFamily="34" charset="-120"/>
               </a:rPr>
-              <a:t>Tied to things Schwan's is actually doing: the Sioux Falls plant, demand forecasting, the CJ integration.</a:t>
+              <a:t>Tied to things Schwan's is actually doing: the Sioux Falls plant opening in 2027, demand forecasting, the CJ integration.</a:t>
             </a:r>
             <a:endParaRPr lang="en-US" sz="1500" dirty="0"/>
           </a:p>

--- a/exports/Schwans_Pitch_Deck.pptx
+++ b/exports/Schwans_Pitch_Deck.pptx
@@ -14,9 +14,10 @@
     <p:sldId id="262" r:id="rId8"/>
     <p:sldId id="263" r:id="rId9"/>
     <p:sldId id="264" r:id="rId10"/>
+    <p:sldId id="265" r:id="rId11"/>
   </p:sldIdLst>
   <p:notesMasterIdLst>
-    <p:notesMasterId r:id="rId11"/>
+    <p:notesMasterId r:id="rId12"/>
   </p:notesMasterIdLst>
   <p:sldSz cx="18288000" cy="10287000"/>
   <p:notesSz cx="10287000" cy="18288000"/>
@@ -534,6 +535,94 @@
             <a:fld id="{F7021451-1387-4CA6-816F-3879F97B5CBC}" type="slidenum">
               <a:rPr lang="en-US"/>
               <a:t>1</a:t>
+            </a:fld>
+            <a:endParaRPr lang="en-US"/>
+          </a:p>
+        </p:txBody>
+      </p:sp>
+    </p:spTree>
+    <p:extLst>
+      <p:ext uri="{BB962C8B-B14F-4D97-AF65-F5344CB8AC3E}">
+        <p14:creationId xmlns:p14="http://schemas.microsoft.com/office/powerpoint/2010/main" val="1024086991"/>
+      </p:ext>
+    </p:extLst>
+  </p:cSld>
+  <p:clrMapOvr>
+    <a:masterClrMapping/>
+  </p:clrMapOvr>
+</p:notes>
+</file>
+
+<file path=ppt/notesSlides/notesSlide10.xml><?xml version="1.0" encoding="utf-8"?>
+<p:notes xmlns:a="http://schemas.openxmlformats.org/drawingml/2006/main" xmlns:r="http://schemas.openxmlformats.org/officeDocument/2006/relationships" xmlns:p="http://schemas.openxmlformats.org/presentationml/2006/main">
+  <p:cSld>
+    <p:spTree>
+      <p:nvGrpSpPr>
+        <p:cNvPr id="1" name=""/>
+        <p:cNvGrpSpPr/>
+        <p:nvPr/>
+      </p:nvGrpSpPr>
+      <p:grpSpPr>
+        <a:xfrm>
+          <a:off x="0" y="0"/>
+          <a:ext cx="0" cy="0"/>
+          <a:chOff x="0" y="0"/>
+          <a:chExt cx="0" cy="0"/>
+        </a:xfrm>
+      </p:grpSpPr>
+      <p:sp>
+        <p:nvSpPr>
+          <p:cNvPr id="2" name="Slide Image Placeholder 1"/>
+          <p:cNvSpPr>
+            <a:spLocks noGrp="1" noRot="1" noChangeAspect="1"/>
+          </p:cNvSpPr>
+          <p:nvPr>
+            <p:ph type="sldImg"/>
+          </p:nvPr>
+        </p:nvSpPr>
+        <p:spPr/>
+      </p:sp>
+      <p:sp>
+        <p:nvSpPr>
+          <p:cNvPr id="3" name="Notes Placeholder 2"/>
+          <p:cNvSpPr>
+            <a:spLocks noGrp="1"/>
+          </p:cNvSpPr>
+          <p:nvPr>
+            <p:ph type="body" idx="1"/>
+          </p:nvPr>
+        </p:nvSpPr>
+        <p:spPr/>
+        <p:txBody>
+          <a:bodyPr/>
+          <a:lstStyle/>
+          <a:p>
+            <a:r>
+              <a:rPr lang="en-US" dirty="0"/>
+              <a:t>Six questions judges ask most. The seventh answer is: I do not know, and I would rather find out than guess.</a:t>
+            </a:r>
+            <a:endParaRPr lang="en-US" dirty="0"/>
+          </a:p>
+        </p:txBody>
+      </p:sp>
+      <p:sp>
+        <p:nvSpPr>
+          <p:cNvPr id="4" name="Slide Number Placeholder 3"/>
+          <p:cNvSpPr>
+            <a:spLocks noGrp="1"/>
+          </p:cNvSpPr>
+          <p:nvPr>
+            <p:ph type="sldNum" sz="quarter" idx="10"/>
+          </p:nvPr>
+        </p:nvSpPr>
+        <p:spPr/>
+        <p:txBody>
+          <a:bodyPr/>
+          <a:lstStyle/>
+          <a:p>
+            <a:fld id="{F7021451-1387-4CA6-816F-3879F97B5CBC}" type="slidenum">
+              <a:rPr lang="en-US"/>
+              <a:t>10</a:t>
             </a:fld>
             <a:endParaRPr lang="en-US"/>
           </a:p>
@@ -2038,6 +2127,931 @@
 </p:sld>
 </file>
 
+<file path=ppt/slides/slide10.xml><?xml version="1.0" encoding="utf-8"?>
+<p:sld xmlns:a="http://schemas.openxmlformats.org/drawingml/2006/main" xmlns:r="http://schemas.openxmlformats.org/officeDocument/2006/relationships" xmlns:p="http://schemas.openxmlformats.org/presentationml/2006/main">
+  <p:cSld name="Slide 10">
+    <p:spTree>
+      <p:nvGrpSpPr>
+        <p:cNvPr id="1" name=""/>
+        <p:cNvGrpSpPr/>
+        <p:nvPr/>
+      </p:nvGrpSpPr>
+      <p:grpSpPr>
+        <a:xfrm>
+          <a:off x="0" y="0"/>
+          <a:ext cx="0" cy="0"/>
+          <a:chOff x="0" y="0"/>
+          <a:chExt cx="0" cy="0"/>
+        </a:xfrm>
+      </p:grpSpPr>
+      <p:sp>
+        <p:nvSpPr>
+          <p:cNvPr id="2" name="Shape 0"/>
+          <p:cNvSpPr/>
+          <p:nvPr/>
+        </p:nvSpPr>
+        <p:spPr>
+          <a:xfrm>
+            <a:off x="0" y="0"/>
+            <a:ext cx="18288000" cy="10287000"/>
+          </a:xfrm>
+          <a:prstGeom prst="rect">
+            <a:avLst/>
+          </a:prstGeom>
+          <a:solidFill>
+            <a:srgbClr val="EEF2F5"/>
+          </a:solidFill>
+          <a:ln w="12700">
+            <a:solidFill>
+              <a:srgbClr val="EEF2F5"/>
+            </a:solidFill>
+            <a:prstDash val="solid"/>
+          </a:ln>
+        </p:spPr>
+      </p:sp>
+      <p:sp>
+        <p:nvSpPr>
+          <p:cNvPr id="3" name="Text 1"/>
+          <p:cNvSpPr txBox="1"/>
+          <p:nvPr/>
+        </p:nvSpPr>
+        <p:spPr>
+          <a:xfrm>
+            <a:off x="1280160" y="914400"/>
+            <a:ext cx="7315200" cy="365760"/>
+          </a:xfrm>
+          <a:prstGeom prst="rect">
+            <a:avLst/>
+          </a:prstGeom>
+          <a:noFill/>
+          <a:ln/>
+        </p:spPr>
+        <p:txBody>
+          <a:bodyPr wrap="square" lIns="0" tIns="0" rIns="0" bIns="0" rtlCol="0" anchor="ctr"/>
+          <a:lstStyle/>
+          <a:p>
+            <a:pPr indent="0" marL="0">
+              <a:buNone/>
+            </a:pPr>
+            <a:r>
+              <a:rPr lang="en-US" sz="1300" b="1" spc="300" kern="0" dirty="0">
+                <a:solidFill>
+                  <a:srgbClr val="6E7788"/>
+                </a:solidFill>
+                <a:latin typeface="Calibri" pitchFamily="34" charset="0"/>
+                <a:ea typeface="Calibri" pitchFamily="34" charset="-122"/>
+                <a:cs typeface="Calibri" pitchFamily="34" charset="-120"/>
+              </a:rPr>
+              <a:t>QUESTIONS TO EXPECT</a:t>
+            </a:r>
+            <a:endParaRPr lang="en-US" sz="1300" dirty="0"/>
+          </a:p>
+        </p:txBody>
+      </p:sp>
+      <p:sp>
+        <p:nvSpPr>
+          <p:cNvPr id="4" name="Text 2"/>
+          <p:cNvSpPr txBox="1"/>
+          <p:nvPr/>
+        </p:nvSpPr>
+        <p:spPr>
+          <a:xfrm>
+            <a:off x="1280160" y="1325880"/>
+            <a:ext cx="12801600" cy="1737360"/>
+          </a:xfrm>
+          <a:prstGeom prst="rect">
+            <a:avLst/>
+          </a:prstGeom>
+          <a:noFill/>
+          <a:ln/>
+        </p:spPr>
+        <p:txBody>
+          <a:bodyPr wrap="square" lIns="0" tIns="0" rIns="0" bIns="0" rtlCol="0" anchor="ctr"/>
+          <a:lstStyle/>
+          <a:p>
+            <a:pPr indent="0" marL="0">
+              <a:lnSpc>
+                <a:spcPct val="106000"/>
+              </a:lnSpc>
+              <a:buNone/>
+            </a:pPr>
+            <a:r>
+              <a:rPr lang="en-US" sz="4200" dirty="0">
+                <a:solidFill>
+                  <a:srgbClr val="232E54"/>
+                </a:solidFill>
+                <a:latin typeface="Bahnschrift SemiBold" pitchFamily="34" charset="0"/>
+                <a:ea typeface="Bahnschrift SemiBold" pitchFamily="34" charset="-122"/>
+                <a:cs typeface="Bahnschrift SemiBold" pitchFamily="34" charset="-120"/>
+              </a:rPr>
+              <a:t>Ask me any of these.</a:t>
+            </a:r>
+            <a:endParaRPr lang="en-US" sz="4200" dirty="0"/>
+          </a:p>
+        </p:txBody>
+      </p:sp>
+      <p:sp>
+        <p:nvSpPr>
+          <p:cNvPr id="5" name="Text 3"/>
+          <p:cNvSpPr txBox="1"/>
+          <p:nvPr/>
+        </p:nvSpPr>
+        <p:spPr>
+          <a:xfrm>
+            <a:off x="1280160" y="3566160"/>
+            <a:ext cx="6858000" cy="594360"/>
+          </a:xfrm>
+          <a:prstGeom prst="rect">
+            <a:avLst/>
+          </a:prstGeom>
+          <a:noFill/>
+          <a:ln/>
+        </p:spPr>
+        <p:txBody>
+          <a:bodyPr wrap="square" lIns="0" tIns="0" rIns="0" bIns="0" rtlCol="0" anchor="ctr"/>
+          <a:lstStyle/>
+          <a:p>
+            <a:pPr indent="0" marL="0">
+              <a:lnSpc>
+                <a:spcPct val="112000"/>
+              </a:lnSpc>
+              <a:buNone/>
+            </a:pPr>
+            <a:r>
+              <a:rPr lang="en-US" sz="2000" dirty="0">
+                <a:solidFill>
+                  <a:srgbClr val="232E54"/>
+                </a:solidFill>
+                <a:latin typeface="Bahnschrift SemiBold" pitchFamily="34" charset="0"/>
+                <a:ea typeface="Bahnschrift SemiBold" pitchFamily="34" charset="-122"/>
+                <a:cs typeface="Bahnschrift SemiBold" pitchFamily="34" charset="-120"/>
+              </a:rPr>
+              <a:t>Are these real numbers?</a:t>
+            </a:r>
+            <a:endParaRPr lang="en-US" sz="2000" dirty="0"/>
+          </a:p>
+        </p:txBody>
+      </p:sp>
+      <p:sp>
+        <p:nvSpPr>
+          <p:cNvPr id="6" name="Text 4"/>
+          <p:cNvSpPr txBox="1"/>
+          <p:nvPr/>
+        </p:nvSpPr>
+        <p:spPr>
+          <a:xfrm>
+            <a:off x="1280160" y="4206240"/>
+            <a:ext cx="6858000" cy="868680"/>
+          </a:xfrm>
+          <a:prstGeom prst="rect">
+            <a:avLst/>
+          </a:prstGeom>
+          <a:noFill/>
+          <a:ln/>
+        </p:spPr>
+        <p:txBody>
+          <a:bodyPr wrap="square" lIns="0" tIns="0" rIns="0" bIns="0" rtlCol="0" anchor="ctr"/>
+          <a:lstStyle/>
+          <a:p>
+            <a:pPr indent="0" marL="0">
+              <a:lnSpc>
+                <a:spcPct val="130000"/>
+              </a:lnSpc>
+              <a:buNone/>
+            </a:pPr>
+            <a:r>
+              <a:rPr lang="en-US" sz="1600" dirty="0">
+                <a:solidFill>
+                  <a:srgbClr val="6E7788"/>
+                </a:solidFill>
+                <a:latin typeface="Calibri" pitchFamily="34" charset="0"/>
+                <a:ea typeface="Calibri" pitchFamily="34" charset="-122"/>
+                <a:cs typeface="Calibri" pitchFamily="34" charset="-120"/>
+              </a:rPr>
+              <a:t>Coverage and headcounts are demo data. The job groups, sites, drivers and regulations are sourced in FACTS.md.</a:t>
+            </a:r>
+            <a:endParaRPr lang="en-US" sz="1600" dirty="0"/>
+          </a:p>
+        </p:txBody>
+      </p:sp>
+      <p:sp>
+        <p:nvSpPr>
+          <p:cNvPr id="7" name="Shape 5"/>
+          <p:cNvSpPr/>
+          <p:nvPr/>
+        </p:nvSpPr>
+        <p:spPr>
+          <a:xfrm>
+            <a:off x="8595360" y="3429000"/>
+            <a:ext cx="0" cy="1554480"/>
+          </a:xfrm>
+          <a:prstGeom prst="line">
+            <a:avLst/>
+          </a:prstGeom>
+          <a:noFill/>
+          <a:ln w="12700">
+            <a:solidFill>
+              <a:srgbClr val="DCE3EA"/>
+            </a:solidFill>
+            <a:prstDash val="solid"/>
+          </a:ln>
+        </p:spPr>
+      </p:sp>
+      <p:sp>
+        <p:nvSpPr>
+          <p:cNvPr id="8" name="Shape 6"/>
+          <p:cNvSpPr/>
+          <p:nvPr/>
+        </p:nvSpPr>
+        <p:spPr>
+          <a:xfrm>
+            <a:off x="1280160" y="5193792"/>
+            <a:ext cx="6858000" cy="0"/>
+          </a:xfrm>
+          <a:prstGeom prst="line">
+            <a:avLst/>
+          </a:prstGeom>
+          <a:noFill/>
+          <a:ln w="12700">
+            <a:solidFill>
+              <a:srgbClr val="DCE3EA"/>
+            </a:solidFill>
+            <a:prstDash val="solid"/>
+          </a:ln>
+        </p:spPr>
+      </p:sp>
+      <p:sp>
+        <p:nvSpPr>
+          <p:cNvPr id="9" name="Text 7"/>
+          <p:cNvSpPr txBox="1"/>
+          <p:nvPr/>
+        </p:nvSpPr>
+        <p:spPr>
+          <a:xfrm>
+            <a:off x="9235440" y="3566160"/>
+            <a:ext cx="6858000" cy="594360"/>
+          </a:xfrm>
+          <a:prstGeom prst="rect">
+            <a:avLst/>
+          </a:prstGeom>
+          <a:noFill/>
+          <a:ln/>
+        </p:spPr>
+        <p:txBody>
+          <a:bodyPr wrap="square" lIns="0" tIns="0" rIns="0" bIns="0" rtlCol="0" anchor="ctr"/>
+          <a:lstStyle/>
+          <a:p>
+            <a:pPr indent="0" marL="0">
+              <a:lnSpc>
+                <a:spcPct val="112000"/>
+              </a:lnSpc>
+              <a:buNone/>
+            </a:pPr>
+            <a:r>
+              <a:rPr lang="en-US" sz="2000" dirty="0">
+                <a:solidFill>
+                  <a:srgbClr val="232E54"/>
+                </a:solidFill>
+                <a:latin typeface="Bahnschrift SemiBold" pitchFamily="34" charset="0"/>
+                <a:ea typeface="Bahnschrift SemiBold" pitchFamily="34" charset="-122"/>
+                <a:cs typeface="Bahnschrift SemiBold" pitchFamily="34" charset="-120"/>
+              </a:rPr>
+              <a:t>Workday already does this. Why build it?</a:t>
+            </a:r>
+            <a:endParaRPr lang="en-US" sz="2000" dirty="0"/>
+          </a:p>
+        </p:txBody>
+      </p:sp>
+      <p:sp>
+        <p:nvSpPr>
+          <p:cNvPr id="10" name="Text 8"/>
+          <p:cNvSpPr txBox="1"/>
+          <p:nvPr/>
+        </p:nvSpPr>
+        <p:spPr>
+          <a:xfrm>
+            <a:off x="9235440" y="4206240"/>
+            <a:ext cx="6858000" cy="868680"/>
+          </a:xfrm>
+          <a:prstGeom prst="rect">
+            <a:avLst/>
+          </a:prstGeom>
+          <a:noFill/>
+          <a:ln/>
+        </p:spPr>
+        <p:txBody>
+          <a:bodyPr wrap="square" lIns="0" tIns="0" rIns="0" bIns="0" rtlCol="0" anchor="ctr"/>
+          <a:lstStyle/>
+          <a:p>
+            <a:pPr indent="0" marL="0">
+              <a:lnSpc>
+                <a:spcPct val="130000"/>
+              </a:lnSpc>
+              <a:buNone/>
+            </a:pPr>
+            <a:r>
+              <a:rPr lang="en-US" sz="1600" dirty="0">
+                <a:solidFill>
+                  <a:srgbClr val="6E7788"/>
+                </a:solidFill>
+                <a:latin typeface="Calibri" pitchFamily="34" charset="0"/>
+                <a:ea typeface="Calibri" pitchFamily="34" charset="-122"/>
+                <a:cs typeface="Calibri" pitchFamily="34" charset="-120"/>
+              </a:rPr>
+              <a:t>Those systems hold the data. This one ranks it and attaches a first step. It is a lens, not a replacement.</a:t>
+            </a:r>
+            <a:endParaRPr lang="en-US" sz="1600" dirty="0"/>
+          </a:p>
+        </p:txBody>
+      </p:sp>
+      <p:sp>
+        <p:nvSpPr>
+          <p:cNvPr id="11" name="Shape 9"/>
+          <p:cNvSpPr/>
+          <p:nvPr/>
+        </p:nvSpPr>
+        <p:spPr>
+          <a:xfrm>
+            <a:off x="9235440" y="5193792"/>
+            <a:ext cx="6858000" cy="0"/>
+          </a:xfrm>
+          <a:prstGeom prst="line">
+            <a:avLst/>
+          </a:prstGeom>
+          <a:noFill/>
+          <a:ln w="12700">
+            <a:solidFill>
+              <a:srgbClr val="DCE3EA"/>
+            </a:solidFill>
+            <a:prstDash val="solid"/>
+          </a:ln>
+        </p:spPr>
+      </p:sp>
+      <p:sp>
+        <p:nvSpPr>
+          <p:cNvPr id="12" name="Text 10"/>
+          <p:cNvSpPr txBox="1"/>
+          <p:nvPr/>
+        </p:nvSpPr>
+        <p:spPr>
+          <a:xfrm>
+            <a:off x="1280160" y="5394960"/>
+            <a:ext cx="6858000" cy="594360"/>
+          </a:xfrm>
+          <a:prstGeom prst="rect">
+            <a:avLst/>
+          </a:prstGeom>
+          <a:noFill/>
+          <a:ln/>
+        </p:spPr>
+        <p:txBody>
+          <a:bodyPr wrap="square" lIns="0" tIns="0" rIns="0" bIns="0" rtlCol="0" anchor="ctr"/>
+          <a:lstStyle/>
+          <a:p>
+            <a:pPr indent="0" marL="0">
+              <a:lnSpc>
+                <a:spcPct val="112000"/>
+              </a:lnSpc>
+              <a:buNone/>
+            </a:pPr>
+            <a:r>
+              <a:rPr lang="en-US" sz="2000" dirty="0">
+                <a:solidFill>
+                  <a:srgbClr val="232E54"/>
+                </a:solidFill>
+                <a:latin typeface="Bahnschrift SemiBold" pitchFamily="34" charset="0"/>
+                <a:ea typeface="Bahnschrift SemiBold" pitchFamily="34" charset="-122"/>
+                <a:cs typeface="Bahnschrift SemiBold" pitchFamily="34" charset="-120"/>
+              </a:rPr>
+              <a:t>Did you use AI to build it?</a:t>
+            </a:r>
+            <a:endParaRPr lang="en-US" sz="2000" dirty="0"/>
+          </a:p>
+        </p:txBody>
+      </p:sp>
+      <p:sp>
+        <p:nvSpPr>
+          <p:cNvPr id="13" name="Text 11"/>
+          <p:cNvSpPr txBox="1"/>
+          <p:nvPr/>
+        </p:nvSpPr>
+        <p:spPr>
+          <a:xfrm>
+            <a:off x="1280160" y="6035040"/>
+            <a:ext cx="6858000" cy="868680"/>
+          </a:xfrm>
+          <a:prstGeom prst="rect">
+            <a:avLst/>
+          </a:prstGeom>
+          <a:noFill/>
+          <a:ln/>
+        </p:spPr>
+        <p:txBody>
+          <a:bodyPr wrap="square" lIns="0" tIns="0" rIns="0" bIns="0" rtlCol="0" anchor="ctr"/>
+          <a:lstStyle/>
+          <a:p>
+            <a:pPr indent="0" marL="0">
+              <a:lnSpc>
+                <a:spcPct val="130000"/>
+              </a:lnSpc>
+              <a:buNone/>
+            </a:pPr>
+            <a:r>
+              <a:rPr lang="en-US" sz="1600" dirty="0">
+                <a:solidFill>
+                  <a:srgbClr val="6E7788"/>
+                </a:solidFill>
+                <a:latin typeface="Calibri" pitchFamily="34" charset="0"/>
+                <a:ea typeface="Calibri" pitchFamily="34" charset="-122"/>
+                <a:cs typeface="Calibri" pitchFamily="34" charset="-120"/>
+              </a:rPr>
+              <a:t>Yes, and the rules allow it. The architecture calls are mine and I can explain any line in the four files.</a:t>
+            </a:r>
+            <a:endParaRPr lang="en-US" sz="1600" dirty="0"/>
+          </a:p>
+        </p:txBody>
+      </p:sp>
+      <p:sp>
+        <p:nvSpPr>
+          <p:cNvPr id="14" name="Shape 12"/>
+          <p:cNvSpPr/>
+          <p:nvPr/>
+        </p:nvSpPr>
+        <p:spPr>
+          <a:xfrm>
+            <a:off x="8595360" y="5257800"/>
+            <a:ext cx="0" cy="1554480"/>
+          </a:xfrm>
+          <a:prstGeom prst="line">
+            <a:avLst/>
+          </a:prstGeom>
+          <a:noFill/>
+          <a:ln w="12700">
+            <a:solidFill>
+              <a:srgbClr val="DCE3EA"/>
+            </a:solidFill>
+            <a:prstDash val="solid"/>
+          </a:ln>
+        </p:spPr>
+      </p:sp>
+      <p:sp>
+        <p:nvSpPr>
+          <p:cNvPr id="15" name="Shape 13"/>
+          <p:cNvSpPr/>
+          <p:nvPr/>
+        </p:nvSpPr>
+        <p:spPr>
+          <a:xfrm>
+            <a:off x="1280160" y="7022592"/>
+            <a:ext cx="6858000" cy="0"/>
+          </a:xfrm>
+          <a:prstGeom prst="line">
+            <a:avLst/>
+          </a:prstGeom>
+          <a:noFill/>
+          <a:ln w="12700">
+            <a:solidFill>
+              <a:srgbClr val="DCE3EA"/>
+            </a:solidFill>
+            <a:prstDash val="solid"/>
+          </a:ln>
+        </p:spPr>
+      </p:sp>
+      <p:sp>
+        <p:nvSpPr>
+          <p:cNvPr id="16" name="Text 14"/>
+          <p:cNvSpPr txBox="1"/>
+          <p:nvPr/>
+        </p:nvSpPr>
+        <p:spPr>
+          <a:xfrm>
+            <a:off x="9235440" y="5394960"/>
+            <a:ext cx="6858000" cy="594360"/>
+          </a:xfrm>
+          <a:prstGeom prst="rect">
+            <a:avLst/>
+          </a:prstGeom>
+          <a:noFill/>
+          <a:ln/>
+        </p:spPr>
+        <p:txBody>
+          <a:bodyPr wrap="square" lIns="0" tIns="0" rIns="0" bIns="0" rtlCol="0" anchor="ctr"/>
+          <a:lstStyle/>
+          <a:p>
+            <a:pPr indent="0" marL="0">
+              <a:lnSpc>
+                <a:spcPct val="112000"/>
+              </a:lnSpc>
+              <a:buNone/>
+            </a:pPr>
+            <a:r>
+              <a:rPr lang="en-US" sz="2000" dirty="0">
+                <a:solidFill>
+                  <a:srgbClr val="232E54"/>
+                </a:solidFill>
+                <a:latin typeface="Bahnschrift SemiBold" pitchFamily="34" charset="0"/>
+                <a:ea typeface="Bahnschrift SemiBold" pitchFamily="34" charset="-122"/>
+                <a:cs typeface="Bahnschrift SemiBold" pitchFamily="34" charset="-120"/>
+              </a:rPr>
+              <a:t>How is the order decided?</a:t>
+            </a:r>
+            <a:endParaRPr lang="en-US" sz="2000" dirty="0"/>
+          </a:p>
+        </p:txBody>
+      </p:sp>
+      <p:sp>
+        <p:nvSpPr>
+          <p:cNvPr id="17" name="Text 15"/>
+          <p:cNvSpPr txBox="1"/>
+          <p:nvPr/>
+        </p:nvSpPr>
+        <p:spPr>
+          <a:xfrm>
+            <a:off x="9235440" y="6035040"/>
+            <a:ext cx="6858000" cy="868680"/>
+          </a:xfrm>
+          <a:prstGeom prst="rect">
+            <a:avLst/>
+          </a:prstGeom>
+          <a:noFill/>
+          <a:ln/>
+        </p:spPr>
+        <p:txBody>
+          <a:bodyPr wrap="square" lIns="0" tIns="0" rIns="0" bIns="0" rtlCol="0" anchor="ctr"/>
+          <a:lstStyle/>
+          <a:p>
+            <a:pPr indent="0" marL="0">
+              <a:lnSpc>
+                <a:spcPct val="130000"/>
+              </a:lnSpc>
+              <a:buNone/>
+            </a:pPr>
+            <a:r>
+              <a:rPr lang="en-US" sz="1600" dirty="0">
+                <a:solidFill>
+                  <a:srgbClr val="6E7788"/>
+                </a:solidFill>
+                <a:latin typeface="Calibri" pitchFamily="34" charset="0"/>
+                <a:ea typeface="Calibri" pitchFamily="34" charset="-122"/>
+                <a:cs typeface="Calibri" pitchFamily="34" charset="-120"/>
+              </a:rPr>
+              <a:t>Impact, how few people hold it, and how big the gap is, multiplied. The formula is on screen, not hidden.</a:t>
+            </a:r>
+            <a:endParaRPr lang="en-US" sz="1600" dirty="0"/>
+          </a:p>
+        </p:txBody>
+      </p:sp>
+      <p:sp>
+        <p:nvSpPr>
+          <p:cNvPr id="18" name="Shape 16"/>
+          <p:cNvSpPr/>
+          <p:nvPr/>
+        </p:nvSpPr>
+        <p:spPr>
+          <a:xfrm>
+            <a:off x="9235440" y="7022592"/>
+            <a:ext cx="6858000" cy="0"/>
+          </a:xfrm>
+          <a:prstGeom prst="line">
+            <a:avLst/>
+          </a:prstGeom>
+          <a:noFill/>
+          <a:ln w="12700">
+            <a:solidFill>
+              <a:srgbClr val="DCE3EA"/>
+            </a:solidFill>
+            <a:prstDash val="solid"/>
+          </a:ln>
+        </p:spPr>
+      </p:sp>
+      <p:sp>
+        <p:nvSpPr>
+          <p:cNvPr id="19" name="Text 17"/>
+          <p:cNvSpPr txBox="1"/>
+          <p:nvPr/>
+        </p:nvSpPr>
+        <p:spPr>
+          <a:xfrm>
+            <a:off x="1280160" y="7223760"/>
+            <a:ext cx="6858000" cy="594360"/>
+          </a:xfrm>
+          <a:prstGeom prst="rect">
+            <a:avLst/>
+          </a:prstGeom>
+          <a:noFill/>
+          <a:ln/>
+        </p:spPr>
+        <p:txBody>
+          <a:bodyPr wrap="square" lIns="0" tIns="0" rIns="0" bIns="0" rtlCol="0" anchor="ctr"/>
+          <a:lstStyle/>
+          <a:p>
+            <a:pPr indent="0" marL="0">
+              <a:lnSpc>
+                <a:spcPct val="112000"/>
+              </a:lnSpc>
+              <a:buNone/>
+            </a:pPr>
+            <a:r>
+              <a:rPr lang="en-US" sz="2000" dirty="0">
+                <a:solidFill>
+                  <a:srgbClr val="232E54"/>
+                </a:solidFill>
+                <a:latin typeface="Bahnschrift SemiBold" pitchFamily="34" charset="0"/>
+                <a:ea typeface="Bahnschrift SemiBold" pitchFamily="34" charset="-122"/>
+                <a:cs typeface="Bahnschrift SemiBold" pitchFamily="34" charset="-120"/>
+              </a:rPr>
+              <a:t>What about privacy?</a:t>
+            </a:r>
+            <a:endParaRPr lang="en-US" sz="2000" dirty="0"/>
+          </a:p>
+        </p:txBody>
+      </p:sp>
+      <p:sp>
+        <p:nvSpPr>
+          <p:cNvPr id="20" name="Text 18"/>
+          <p:cNvSpPr txBox="1"/>
+          <p:nvPr/>
+        </p:nvSpPr>
+        <p:spPr>
+          <a:xfrm>
+            <a:off x="1280160" y="7863840"/>
+            <a:ext cx="6858000" cy="868680"/>
+          </a:xfrm>
+          <a:prstGeom prst="rect">
+            <a:avLst/>
+          </a:prstGeom>
+          <a:noFill/>
+          <a:ln/>
+        </p:spPr>
+        <p:txBody>
+          <a:bodyPr wrap="square" lIns="0" tIns="0" rIns="0" bIns="0" rtlCol="0" anchor="ctr"/>
+          <a:lstStyle/>
+          <a:p>
+            <a:pPr indent="0" marL="0">
+              <a:lnSpc>
+                <a:spcPct val="130000"/>
+              </a:lnSpc>
+              <a:buNone/>
+            </a:pPr>
+            <a:r>
+              <a:rPr lang="en-US" sz="1600" dirty="0">
+                <a:solidFill>
+                  <a:srgbClr val="6E7788"/>
+                </a:solidFill>
+                <a:latin typeface="Calibri" pitchFamily="34" charset="0"/>
+                <a:ea typeface="Calibri" pitchFamily="34" charset="-122"/>
+                <a:cs typeface="Calibri" pitchFamily="34" charset="-120"/>
+              </a:rPr>
+              <a:t>Skills and training records only. No performance data. Employees see their own record, and the demo shows no real people.</a:t>
+            </a:r>
+            <a:endParaRPr lang="en-US" sz="1600" dirty="0"/>
+          </a:p>
+        </p:txBody>
+      </p:sp>
+      <p:sp>
+        <p:nvSpPr>
+          <p:cNvPr id="21" name="Shape 19"/>
+          <p:cNvSpPr/>
+          <p:nvPr/>
+        </p:nvSpPr>
+        <p:spPr>
+          <a:xfrm>
+            <a:off x="8595360" y="7086600"/>
+            <a:ext cx="0" cy="1554480"/>
+          </a:xfrm>
+          <a:prstGeom prst="line">
+            <a:avLst/>
+          </a:prstGeom>
+          <a:noFill/>
+          <a:ln w="12700">
+            <a:solidFill>
+              <a:srgbClr val="DCE3EA"/>
+            </a:solidFill>
+            <a:prstDash val="solid"/>
+          </a:ln>
+        </p:spPr>
+      </p:sp>
+      <p:sp>
+        <p:nvSpPr>
+          <p:cNvPr id="22" name="Text 20"/>
+          <p:cNvSpPr txBox="1"/>
+          <p:nvPr/>
+        </p:nvSpPr>
+        <p:spPr>
+          <a:xfrm>
+            <a:off x="9235440" y="7223760"/>
+            <a:ext cx="6858000" cy="594360"/>
+          </a:xfrm>
+          <a:prstGeom prst="rect">
+            <a:avLst/>
+          </a:prstGeom>
+          <a:noFill/>
+          <a:ln/>
+        </p:spPr>
+        <p:txBody>
+          <a:bodyPr wrap="square" lIns="0" tIns="0" rIns="0" bIns="0" rtlCol="0" anchor="ctr"/>
+          <a:lstStyle/>
+          <a:p>
+            <a:pPr indent="0" marL="0">
+              <a:lnSpc>
+                <a:spcPct val="112000"/>
+              </a:lnSpc>
+              <a:buNone/>
+            </a:pPr>
+            <a:r>
+              <a:rPr lang="en-US" sz="2000" dirty="0">
+                <a:solidFill>
+                  <a:srgbClr val="232E54"/>
+                </a:solidFill>
+                <a:latin typeface="Bahnschrift SemiBold" pitchFamily="34" charset="0"/>
+                <a:ea typeface="Bahnschrift SemiBold" pitchFamily="34" charset="-122"/>
+                <a:cs typeface="Bahnschrift SemiBold" pitchFamily="34" charset="-120"/>
+              </a:rPr>
+              <a:t>What is still missing?</a:t>
+            </a:r>
+            <a:endParaRPr lang="en-US" sz="2000" dirty="0"/>
+          </a:p>
+        </p:txBody>
+      </p:sp>
+      <p:sp>
+        <p:nvSpPr>
+          <p:cNvPr id="23" name="Text 21"/>
+          <p:cNvSpPr txBox="1"/>
+          <p:nvPr/>
+        </p:nvSpPr>
+        <p:spPr>
+          <a:xfrm>
+            <a:off x="9235440" y="7863840"/>
+            <a:ext cx="6858000" cy="868680"/>
+          </a:xfrm>
+          <a:prstGeom prst="rect">
+            <a:avLst/>
+          </a:prstGeom>
+          <a:noFill/>
+          <a:ln/>
+        </p:spPr>
+        <p:txBody>
+          <a:bodyPr wrap="square" lIns="0" tIns="0" rIns="0" bIns="0" rtlCol="0" anchor="ctr"/>
+          <a:lstStyle/>
+          <a:p>
+            <a:pPr indent="0" marL="0">
+              <a:lnSpc>
+                <a:spcPct val="130000"/>
+              </a:lnSpc>
+              <a:buNone/>
+            </a:pPr>
+            <a:r>
+              <a:rPr lang="en-US" sz="1600" dirty="0">
+                <a:solidFill>
+                  <a:srgbClr val="6E7788"/>
+                </a:solidFill>
+                <a:latin typeface="Calibri" pitchFamily="34" charset="0"/>
+                <a:ea typeface="Calibri" pitchFamily="34" charset="-122"/>
+                <a:cs typeface="Calibri" pitchFamily="34" charset="-120"/>
+              </a:rPr>
+              <a:t>Real data, plans matched to people automatically, and a team view for the manager who would open it weekly.</a:t>
+            </a:r>
+            <a:endParaRPr lang="en-US" sz="1600" dirty="0"/>
+          </a:p>
+        </p:txBody>
+      </p:sp>
+      <p:sp>
+        <p:nvSpPr>
+          <p:cNvPr id="24" name="Shape 22"/>
+          <p:cNvSpPr/>
+          <p:nvPr/>
+        </p:nvSpPr>
+        <p:spPr>
+          <a:xfrm>
+            <a:off x="1280160" y="9189720"/>
+            <a:ext cx="15727680" cy="0"/>
+          </a:xfrm>
+          <a:prstGeom prst="line">
+            <a:avLst/>
+          </a:prstGeom>
+          <a:noFill/>
+          <a:ln w="12700">
+            <a:solidFill>
+              <a:srgbClr val="D9D9D9"/>
+            </a:solidFill>
+            <a:prstDash val="solid"/>
+          </a:ln>
+        </p:spPr>
+      </p:sp>
+      <p:sp>
+        <p:nvSpPr>
+          <p:cNvPr id="25" name="Text 23"/>
+          <p:cNvSpPr txBox="1"/>
+          <p:nvPr/>
+        </p:nvSpPr>
+        <p:spPr>
+          <a:xfrm>
+            <a:off x="1280160" y="9372600"/>
+            <a:ext cx="8138160" cy="411480"/>
+          </a:xfrm>
+          <a:prstGeom prst="rect">
+            <a:avLst/>
+          </a:prstGeom>
+          <a:noFill/>
+          <a:ln/>
+        </p:spPr>
+        <p:txBody>
+          <a:bodyPr wrap="square" lIns="0" tIns="0" rIns="0" bIns="0" rtlCol="0" anchor="ctr"/>
+          <a:lstStyle/>
+          <a:p>
+            <a:pPr indent="0" marL="0">
+              <a:buNone/>
+            </a:pPr>
+            <a:r>
+              <a:rPr lang="en-US" sz="1400" b="1" spc="200" kern="0" dirty="0">
+                <a:solidFill>
+                  <a:srgbClr val="6E7788"/>
+                </a:solidFill>
+                <a:latin typeface="Calibri" pitchFamily="34" charset="0"/>
+                <a:ea typeface="Calibri" pitchFamily="34" charset="-122"/>
+                <a:cs typeface="Calibri" pitchFamily="34" charset="-120"/>
+              </a:rPr>
+              <a:t>IN THE APP   </a:t>
+            </a:r>
+            <a:pPr indent="0" marL="0">
+              <a:buNone/>
+            </a:pPr>
+            <a:r>
+              <a:rPr lang="en-US" sz="1400" dirty="0">
+                <a:solidFill>
+                  <a:srgbClr val="18212F"/>
+                </a:solidFill>
+                <a:latin typeface="Calibri" pitchFamily="34" charset="0"/>
+                <a:ea typeface="Calibri" pitchFamily="34" charset="-122"/>
+                <a:cs typeface="Calibri" pitchFamily="34" charset="-120"/>
+              </a:rPr>
+              <a:t>Q&amp;A.html in the repository has the full sheet</a:t>
+            </a:r>
+            <a:endParaRPr lang="en-US" sz="1400" dirty="0"/>
+          </a:p>
+        </p:txBody>
+      </p:sp>
+      <p:sp>
+        <p:nvSpPr>
+          <p:cNvPr id="26" name="Text 24"/>
+          <p:cNvSpPr txBox="1"/>
+          <p:nvPr/>
+        </p:nvSpPr>
+        <p:spPr>
+          <a:xfrm>
+            <a:off x="9418320" y="9372600"/>
+            <a:ext cx="7589520" cy="411480"/>
+          </a:xfrm>
+          <a:prstGeom prst="rect">
+            <a:avLst/>
+          </a:prstGeom>
+          <a:noFill/>
+          <a:ln/>
+        </p:spPr>
+        <p:txBody>
+          <a:bodyPr wrap="square" lIns="0" tIns="0" rIns="0" bIns="0" rtlCol="0" anchor="ctr"/>
+          <a:lstStyle/>
+          <a:p>
+            <a:pPr indent="0" marL="0">
+              <a:buNone/>
+            </a:pPr>
+            <a:r>
+              <a:rPr lang="en-US" sz="1400" b="1" spc="200" kern="0" dirty="0">
+                <a:solidFill>
+                  <a:srgbClr val="6E7788"/>
+                </a:solidFill>
+                <a:latin typeface="Calibri" pitchFamily="34" charset="0"/>
+                <a:ea typeface="Calibri" pitchFamily="34" charset="-122"/>
+                <a:cs typeface="Calibri" pitchFamily="34" charset="-120"/>
+              </a:rPr>
+              <a:t>NUMBERS FROM   </a:t>
+            </a:r>
+            <a:pPr indent="0" marL="0">
+              <a:buNone/>
+            </a:pPr>
+            <a:r>
+              <a:rPr lang="en-US" sz="1400" dirty="0">
+                <a:solidFill>
+                  <a:srgbClr val="18212F"/>
+                </a:solidFill>
+                <a:latin typeface="Calibri" pitchFamily="34" charset="0"/>
+                <a:ea typeface="Calibri" pitchFamily="34" charset="-122"/>
+                <a:cs typeface="Calibri" pitchFamily="34" charset="-120"/>
+              </a:rPr>
+              <a:t>FACTS.md lists every claim, its source, and what was cut</a:t>
+            </a:r>
+            <a:endParaRPr lang="en-US" sz="1400" dirty="0"/>
+          </a:p>
+        </p:txBody>
+      </p:sp>
+    </p:spTree>
+  </p:cSld>
+  <p:clrMapOvr>
+    <a:masterClrMapping/>
+  </p:clrMapOvr>
+</p:sld>
+</file>
+
 <file path=ppt/slides/slide2.xml><?xml version="1.0" encoding="utf-8"?>
 <p:sld xmlns:a="http://schemas.openxmlformats.org/drawingml/2006/main" xmlns:r="http://schemas.openxmlformats.org/officeDocument/2006/relationships" xmlns:p="http://schemas.openxmlformats.org/presentationml/2006/main">
   <p:cSld name="Slide 2">
